--- a/deliverables/HeThongQuanLyPhongGym_Slides.pptx
+++ b/deliverables/HeThongQuanLyPhongGym_Slides.pptx
@@ -3633,7 +3633,7 @@
             </a:r>
             <a:r>
               <a:rPr/>
-              <a:t>: 18 → 3, giảm 83,3%</a:t>
+              <a:t>: 16 → 6, giảm 62,5%</a:t>
             </a:r>
           </a:p>
         </p:txBody>
